--- a/classes/parte-18-ia-aplicada-a-la-ciberseguridad/340-capstone-pentest-autorizado-asistido-por-ia-con-mcp/clase-340-presentacion.pptx
+++ b/classes/parte-18-ia-aplicada-a-la-ciberseguridad/340-capstone-pentest-autorizado-asistido-por-ia-con-mcp/clase-340-presentacion.pptx
@@ -17,6 +17,10 @@
     <p:sldId id="265" r:id="rId16"/>
     <p:sldId id="266" r:id="rId17"/>
     <p:sldId id="267" r:id="rId18"/>
+    <p:sldId id="268" r:id="rId19"/>
+    <p:sldId id="269" r:id="rId20"/>
+    <p:sldId id="270" r:id="rId21"/>
+    <p:sldId id="271" r:id="rId22"/>
   </p:sldIdLst>
   <p:sldSz cx="9144000" cy="6858000" type="screen4x3"/>
   <p:notesSz cx="6858000" cy="9144000"/>
@@ -3198,7 +3202,7 @@
                   <a:srgbClr val="0B3D2E"/>
                 </a:solidFill>
               </a:rPr>
-              <a:t>⚠️ Errores comunes</a:t>
+              <a:t>🧪 Desarrollo guiado</a:t>
             </a:r>
           </a:p>
         </p:txBody>
@@ -3236,67 +3240,97 @@
                   <a:srgbClr val="22282E"/>
                 </a:solidFill>
               </a:rPr>
-              <a:t>•  Empezar sin RoE ni alcance — Nunca. Define y limita el alcance por escrito antes de tocar nada.</a:t>
-            </a:r>
-          </a:p>
-          <a:p>
-            <a:pPr>
-              <a:spcAft>
-                <a:spcPts val="600"/>
-              </a:spcAft>
-            </a:pPr>
-            <a:r>
-              <a:rPr sz="1500">
-                <a:solidFill>
-                  <a:srgbClr val="22282E"/>
-                </a:solidFill>
-              </a:rPr>
-              <a:t>•  Hallazgos no reproducibles en el informe — Verifica todo a mano; elimina lo que no puedas respaldar.</a:t>
-            </a:r>
-          </a:p>
-          <a:p>
-            <a:pPr>
-              <a:spcAft>
-                <a:spcPts val="600"/>
-              </a:spcAft>
-            </a:pPr>
-            <a:r>
-              <a:rPr sz="1500">
-                <a:solidFill>
-                  <a:srgbClr val="22282E"/>
-                </a:solidFill>
-              </a:rPr>
-              <a:t>•  Dejar que el agente actúe sin aprobación — Rompe la supervisión. Aprueba cada acción con impacto.</a:t>
-            </a:r>
-          </a:p>
-          <a:p>
-            <a:pPr>
-              <a:spcAft>
-                <a:spcPts val="600"/>
-              </a:spcAft>
-            </a:pPr>
-            <a:r>
-              <a:rPr sz="1500">
-                <a:solidFill>
-                  <a:srgbClr val="22282E"/>
-                </a:solidFill>
-              </a:rPr>
-              <a:t>•  Objetivo fuera de tu propiedad — Ilegal. Solo tu laboratorio.</a:t>
-            </a:r>
-          </a:p>
-          <a:p>
-            <a:pPr>
-              <a:spcAft>
-                <a:spcPts val="600"/>
-              </a:spcAft>
-            </a:pPr>
-            <a:r>
-              <a:rPr sz="1500">
-                <a:solidFill>
-                  <a:srgbClr val="22282E"/>
-                </a:solidFill>
-              </a:rPr>
-              <a:t>•  Retrospectiva ausente — Pierdes el aprendizaje. Analiza críticamente el uso de IA.</a:t>
+              <a:t>•  Escribe tu RoE + guardrails. Alcance = tu VM; matriz de permisos; política de datos; registro de auditoría.</a:t>
+            </a:r>
+          </a:p>
+          <a:p>
+            <a:pPr>
+              <a:spcAft>
+                <a:spcPts val="600"/>
+              </a:spcAft>
+            </a:pPr>
+            <a:r>
+              <a:rPr sz="1500">
+                <a:solidFill>
+                  <a:srgbClr val="22282E"/>
+                </a:solidFill>
+              </a:rPr>
+              <a:t>•  Monta kali-mcp y verifica el aislamiento de red del contenedor.</a:t>
+            </a:r>
+          </a:p>
+          <a:p>
+            <a:pPr>
+              <a:spcAft>
+                <a:spcPts val="600"/>
+              </a:spcAft>
+            </a:pPr>
+            <a:r>
+              <a:rPr sz="1500">
+                <a:solidFill>
+                  <a:srgbClr val="22282E"/>
+                </a:solidFill>
+              </a:rPr>
+              <a:t>•  Recon y auditoría asistidos, validando manualmente cada hallazgo clave.</a:t>
+            </a:r>
+          </a:p>
+          <a:p>
+            <a:pPr>
+              <a:spcAft>
+                <a:spcPts val="600"/>
+              </a:spcAft>
+            </a:pPr>
+            <a:r>
+              <a:rPr sz="1500">
+                <a:solidFill>
+                  <a:srgbClr val="22282E"/>
+                </a:solidFill>
+              </a:rPr>
+              <a:t>•  Elige y aprueba un vector de PoC de bajo impacto; ejecútalo con trazabilidad.</a:t>
+            </a:r>
+          </a:p>
+          <a:p>
+            <a:pPr>
+              <a:spcAft>
+                <a:spcPts val="600"/>
+              </a:spcAft>
+            </a:pPr>
+            <a:r>
+              <a:rPr sz="1500">
+                <a:solidFill>
+                  <a:srgbClr val="22282E"/>
+                </a:solidFill>
+              </a:rPr>
+              <a:t>•  Post-explotación mínima para demostrar impacto, sin tocar datos ni salir de alcance.</a:t>
+            </a:r>
+          </a:p>
+          <a:p>
+            <a:pPr>
+              <a:spcAft>
+                <a:spcPts val="600"/>
+              </a:spcAft>
+            </a:pPr>
+            <a:r>
+              <a:rPr sz="1500">
+                <a:solidFill>
+                  <a:srgbClr val="22282E"/>
+                </a:solidFill>
+              </a:rPr>
+              <a:t>•  Genera el informe con IA y verifica cada hallazgo contra la evidencia.</a:t>
+            </a:r>
+          </a:p>
+          <a:p>
+            <a:pPr>
+              <a:spcAft>
+                <a:spcPts val="600"/>
+              </a:spcAft>
+            </a:pPr>
+            <a:r>
+              <a:rPr sz="1500">
+                <a:solidFill>
+                  <a:srgbClr val="22282E"/>
+                </a:solidFill>
+              </a:rPr>
+              <a:t>•  Retrospectiva: ¿qué aceleró la IA? ¿qué alucinó? ¿dónde fue imprescindible tu criterio?</a:t>
             </a:r>
           </a:p>
         </p:txBody>
@@ -3347,7 +3381,7 @@
                   <a:srgbClr val="0B3D2E"/>
                 </a:solidFill>
               </a:rPr>
-              <a:t>❓ Preguntas frecuentes</a:t>
+              <a:t>✍️ Ejercicios</a:t>
             </a:r>
           </a:p>
         </p:txBody>
@@ -3385,97 +3419,67 @@
                   <a:srgbClr val="22282E"/>
                 </a:solidFill>
               </a:rPr>
-              <a:t>•  ❓ ¿Qué nivel de autonomía le doy al agente en el capstone?</a:t>
-            </a:r>
-          </a:p>
-          <a:p>
-            <a:pPr>
-              <a:spcAft>
-                <a:spcPts val="600"/>
-              </a:spcAft>
-            </a:pPr>
-            <a:r>
-              <a:rPr sz="1500">
-                <a:solidFill>
-                  <a:srgbClr val="22282E"/>
-                </a:solidFill>
-              </a:rPr>
-              <a:t>•  El mínimo para ser útil: recon y resúmenes pueden ser más automáticos; toda acción activa o con</a:t>
-            </a:r>
-          </a:p>
-          <a:p>
-            <a:pPr>
-              <a:spcAft>
-                <a:spcPts val="600"/>
-              </a:spcAft>
-            </a:pPr>
-            <a:r>
-              <a:rPr sz="1500">
-                <a:solidFill>
-                  <a:srgbClr val="22282E"/>
-                </a:solidFill>
-              </a:rPr>
-              <a:t>•  impacto requiere tu aprobación. Tú firmas el informe.</a:t>
-            </a:r>
-          </a:p>
-          <a:p>
-            <a:pPr>
-              <a:spcAft>
-                <a:spcPts val="600"/>
-              </a:spcAft>
-            </a:pPr>
-            <a:r>
-              <a:rPr sz="1500">
-                <a:solidFill>
-                  <a:srgbClr val="22282E"/>
-                </a:solidFill>
-              </a:rPr>
-              <a:t>•  ❓ ¿Y si la IA se equivoca en un hallazgo?</a:t>
-            </a:r>
-          </a:p>
-          <a:p>
-            <a:pPr>
-              <a:spcAft>
-                <a:spcPts val="600"/>
-              </a:spcAft>
-            </a:pPr>
-            <a:r>
-              <a:rPr sz="1500">
-                <a:solidFill>
-                  <a:srgbClr val="22282E"/>
-                </a:solidFill>
-              </a:rPr>
-              <a:t>•  Por eso verificas todo contra la evidencia. Documentar una alucinación que tu supervisión</a:t>
-            </a:r>
-          </a:p>
-          <a:p>
-            <a:pPr>
-              <a:spcAft>
-                <a:spcPts val="600"/>
-              </a:spcAft>
-            </a:pPr>
-            <a:r>
-              <a:rPr sz="1500">
-                <a:solidFill>
-                  <a:srgbClr val="22282E"/>
-                </a:solidFill>
-              </a:rPr>
-              <a:t>•  corrigió es, de hecho, parte del aprendizaje del capstone.</a:t>
-            </a:r>
-          </a:p>
-          <a:p>
-            <a:pPr>
-              <a:spcAft>
-                <a:spcPts val="600"/>
-              </a:spcAft>
-            </a:pPr>
-            <a:r>
-              <a:rPr sz="1500">
-                <a:solidFill>
-                  <a:srgbClr val="22282E"/>
-                </a:solidFill>
-              </a:rPr>
-              <a:t>•  ❓ ¿Esto es el final del programa?</a:t>
+              <a:t>•  Redacta el documento de alcance/RoE de tu capstone.</a:t>
+            </a:r>
+          </a:p>
+          <a:p>
+            <a:pPr>
+              <a:spcAft>
+                <a:spcPts val="600"/>
+              </a:spcAft>
+            </a:pPr>
+            <a:r>
+              <a:rPr sz="1500">
+                <a:solidFill>
+                  <a:srgbClr val="22282E"/>
+                </a:solidFill>
+              </a:rPr>
+              <a:t>•  Diseña la matriz de permisos del agente para esta operación.</a:t>
+            </a:r>
+          </a:p>
+          <a:p>
+            <a:pPr>
+              <a:spcAft>
+                <a:spcPts val="600"/>
+              </a:spcAft>
+            </a:pPr>
+            <a:r>
+              <a:rPr sz="1500">
+                <a:solidFill>
+                  <a:srgbClr val="22282E"/>
+                </a:solidFill>
+              </a:rPr>
+              <a:t>•  Define cómo registrarás la trazabilidad de cada acción.</a:t>
+            </a:r>
+          </a:p>
+          <a:p>
+            <a:pPr>
+              <a:spcAft>
+                <a:spcPts val="600"/>
+              </a:spcAft>
+            </a:pPr>
+            <a:r>
+              <a:rPr sz="1500">
+                <a:solidFill>
+                  <a:srgbClr val="22282E"/>
+                </a:solidFill>
+              </a:rPr>
+              <a:t>•  Especifica los límites de post-explotación que respetarás.</a:t>
+            </a:r>
+          </a:p>
+          <a:p>
+            <a:pPr>
+              <a:spcAft>
+                <a:spcPts val="600"/>
+              </a:spcAft>
+            </a:pPr>
+            <a:r>
+              <a:rPr sz="1500">
+                <a:solidFill>
+                  <a:srgbClr val="22282E"/>
+                </a:solidFill>
+              </a:rPr>
+              <a:t>•  Prepara la plantilla del informe final.</a:t>
             </a:r>
           </a:p>
         </p:txBody>
@@ -3526,7 +3530,7 @@
                   <a:srgbClr val="0B3D2E"/>
                 </a:solidFill>
               </a:rPr>
-              <a:t>🔗 Referencias</a:t>
+              <a:t>📝 Reto verificable (entregable del capstone)</a:t>
             </a:r>
           </a:p>
         </p:txBody>
@@ -3564,6 +3568,513 @@
                   <a:srgbClr val="22282E"/>
                 </a:solidFill>
               </a:rPr>
+              <a:t>•  Un paquete de engagement de tu laboratorio que incluya: (a) RoE + guardrails, (b) registro</a:t>
+            </a:r>
+          </a:p>
+          <a:p>
+            <a:pPr>
+              <a:spcAft>
+                <a:spcPts val="600"/>
+              </a:spcAft>
+            </a:pPr>
+            <a:r>
+              <a:rPr sz="1500">
+                <a:solidFill>
+                  <a:srgbClr val="22282E"/>
+                </a:solidFill>
+              </a:rPr>
+              <a:t>•  de auditoría de la sesión, (c) informe con hallazgos reproducibles, y (d) una retrospectiva</a:t>
+            </a:r>
+          </a:p>
+          <a:p>
+            <a:pPr>
+              <a:spcAft>
+                <a:spcPts val="600"/>
+              </a:spcAft>
+            </a:pPr>
+            <a:r>
+              <a:rPr sz="1500">
+                <a:solidFill>
+                  <a:srgbClr val="22282E"/>
+                </a:solidFill>
+              </a:rPr>
+              <a:t>•  crítica del uso de IA.</a:t>
+            </a:r>
+          </a:p>
+          <a:p>
+            <a:pPr>
+              <a:spcAft>
+                <a:spcPts val="600"/>
+              </a:spcAft>
+            </a:pPr>
+            <a:r>
+              <a:rPr sz="1500">
+                <a:solidFill>
+                  <a:srgbClr val="22282E"/>
+                </a:solidFill>
+              </a:rPr>
+              <a:t>•  Criterio de aceptación: todo ocurrió dentro del alcance (tu VM); cada acción con impacto fue</a:t>
+            </a:r>
+          </a:p>
+          <a:p>
+            <a:pPr>
+              <a:spcAft>
+                <a:spcPts val="600"/>
+              </a:spcAft>
+            </a:pPr>
+            <a:r>
+              <a:rPr sz="1500">
+                <a:solidFill>
+                  <a:srgbClr val="22282E"/>
+                </a:solidFill>
+              </a:rPr>
+              <a:t>•  aprobada por ti; cada hallazgo del informe es reproducible manualmente; la retrospectiva</a:t>
+            </a:r>
+          </a:p>
+          <a:p>
+            <a:pPr>
+              <a:spcAft>
+                <a:spcPts val="600"/>
+              </a:spcAft>
+            </a:pPr>
+            <a:r>
+              <a:rPr sz="1500">
+                <a:solidFill>
+                  <a:srgbClr val="22282E"/>
+                </a:solidFill>
+              </a:rPr>
+              <a:t>•  identifica al menos un aporte real de la IA y al menos una limitación (p. ej. una alucinación) que</a:t>
+            </a:r>
+          </a:p>
+          <a:p>
+            <a:pPr>
+              <a:spcAft>
+                <a:spcPts val="600"/>
+              </a:spcAft>
+            </a:pPr>
+            <a:r>
+              <a:rPr sz="1500">
+                <a:solidFill>
+                  <a:srgbClr val="22282E"/>
+                </a:solidFill>
+              </a:rPr>
+              <a:t>•  tu supervisión corrigió.</a:t>
+            </a:r>
+          </a:p>
+        </p:txBody>
+      </p:sp>
+    </p:spTree>
+  </p:cSld>
+  <p:clrMapOvr>
+    <a:masterClrMapping/>
+  </p:clrMapOvr>
+</p:sld>
+</file>
+
+<file path=ppt/slides/slide13.xml><?xml version="1.0" encoding="utf-8"?>
+<p:sld xmlns:a="http://schemas.openxmlformats.org/drawingml/2006/main" xmlns:p="http://schemas.openxmlformats.org/presentationml/2006/main" xmlns:r="http://schemas.openxmlformats.org/officeDocument/2006/relationships">
+  <p:cSld>
+    <p:spTree>
+      <p:nvGrpSpPr>
+        <p:cNvPr id="1" name=""/>
+        <p:cNvGrpSpPr/>
+        <p:nvPr/>
+      </p:nvGrpSpPr>
+      <p:grpSpPr/>
+      <p:sp>
+        <p:nvSpPr>
+          <p:cNvPr id="2" name="TextBox 1"/>
+          <p:cNvSpPr txBox="1"/>
+          <p:nvPr/>
+        </p:nvSpPr>
+        <p:spPr>
+          <a:xfrm>
+            <a:off x="457200" y="320040"/>
+            <a:ext cx="8229600" cy="822960"/>
+          </a:xfrm>
+          <a:prstGeom prst="rect">
+            <a:avLst/>
+          </a:prstGeom>
+          <a:noFill/>
+        </p:spPr>
+        <p:txBody>
+          <a:bodyPr wrap="square">
+            <a:spAutoFit/>
+          </a:bodyPr>
+          <a:lstStyle/>
+          <a:p>
+            <a:r>
+              <a:rPr sz="2600" b="1">
+                <a:solidFill>
+                  <a:srgbClr val="0B3D2E"/>
+                </a:solidFill>
+              </a:rPr>
+              <a:t>⚠️ Errores comunes</a:t>
+            </a:r>
+          </a:p>
+        </p:txBody>
+      </p:sp>
+      <p:sp>
+        <p:nvSpPr>
+          <p:cNvPr id="3" name="TextBox 2"/>
+          <p:cNvSpPr txBox="1"/>
+          <p:nvPr/>
+        </p:nvSpPr>
+        <p:spPr>
+          <a:xfrm>
+            <a:off x="457200" y="1280160"/>
+            <a:ext cx="8229600" cy="4937760"/>
+          </a:xfrm>
+          <a:prstGeom prst="rect">
+            <a:avLst/>
+          </a:prstGeom>
+          <a:noFill/>
+        </p:spPr>
+        <p:txBody>
+          <a:bodyPr wrap="square">
+            <a:spAutoFit/>
+          </a:bodyPr>
+          <a:lstStyle/>
+          <a:p>
+            <a:pPr>
+              <a:spcAft>
+                <a:spcPts val="600"/>
+              </a:spcAft>
+            </a:pPr>
+            <a:r>
+              <a:rPr sz="1500">
+                <a:solidFill>
+                  <a:srgbClr val="22282E"/>
+                </a:solidFill>
+              </a:rPr>
+              <a:t>•  Empezar sin RoE ni alcance — Nunca. Define y limita el alcance por escrito antes de tocar nada.</a:t>
+            </a:r>
+          </a:p>
+          <a:p>
+            <a:pPr>
+              <a:spcAft>
+                <a:spcPts val="600"/>
+              </a:spcAft>
+            </a:pPr>
+            <a:r>
+              <a:rPr sz="1500">
+                <a:solidFill>
+                  <a:srgbClr val="22282E"/>
+                </a:solidFill>
+              </a:rPr>
+              <a:t>•  Hallazgos no reproducibles en el informe — Verifica todo a mano; elimina lo que no puedas respaldar.</a:t>
+            </a:r>
+          </a:p>
+          <a:p>
+            <a:pPr>
+              <a:spcAft>
+                <a:spcPts val="600"/>
+              </a:spcAft>
+            </a:pPr>
+            <a:r>
+              <a:rPr sz="1500">
+                <a:solidFill>
+                  <a:srgbClr val="22282E"/>
+                </a:solidFill>
+              </a:rPr>
+              <a:t>•  Dejar que el agente actúe sin aprobación — Rompe la supervisión. Aprueba cada acción con impacto.</a:t>
+            </a:r>
+          </a:p>
+          <a:p>
+            <a:pPr>
+              <a:spcAft>
+                <a:spcPts val="600"/>
+              </a:spcAft>
+            </a:pPr>
+            <a:r>
+              <a:rPr sz="1500">
+                <a:solidFill>
+                  <a:srgbClr val="22282E"/>
+                </a:solidFill>
+              </a:rPr>
+              <a:t>•  Objetivo fuera de tu propiedad — Ilegal. Solo tu laboratorio.</a:t>
+            </a:r>
+          </a:p>
+          <a:p>
+            <a:pPr>
+              <a:spcAft>
+                <a:spcPts val="600"/>
+              </a:spcAft>
+            </a:pPr>
+            <a:r>
+              <a:rPr sz="1500">
+                <a:solidFill>
+                  <a:srgbClr val="22282E"/>
+                </a:solidFill>
+              </a:rPr>
+              <a:t>•  Retrospectiva ausente — Pierdes el aprendizaje. Analiza críticamente el uso de IA.</a:t>
+            </a:r>
+          </a:p>
+        </p:txBody>
+      </p:sp>
+    </p:spTree>
+  </p:cSld>
+  <p:clrMapOvr>
+    <a:masterClrMapping/>
+  </p:clrMapOvr>
+</p:sld>
+</file>
+
+<file path=ppt/slides/slide14.xml><?xml version="1.0" encoding="utf-8"?>
+<p:sld xmlns:a="http://schemas.openxmlformats.org/drawingml/2006/main" xmlns:p="http://schemas.openxmlformats.org/presentationml/2006/main" xmlns:r="http://schemas.openxmlformats.org/officeDocument/2006/relationships">
+  <p:cSld>
+    <p:spTree>
+      <p:nvGrpSpPr>
+        <p:cNvPr id="1" name=""/>
+        <p:cNvGrpSpPr/>
+        <p:nvPr/>
+      </p:nvGrpSpPr>
+      <p:grpSpPr/>
+      <p:sp>
+        <p:nvSpPr>
+          <p:cNvPr id="2" name="TextBox 1"/>
+          <p:cNvSpPr txBox="1"/>
+          <p:nvPr/>
+        </p:nvSpPr>
+        <p:spPr>
+          <a:xfrm>
+            <a:off x="457200" y="320040"/>
+            <a:ext cx="8229600" cy="822960"/>
+          </a:xfrm>
+          <a:prstGeom prst="rect">
+            <a:avLst/>
+          </a:prstGeom>
+          <a:noFill/>
+        </p:spPr>
+        <p:txBody>
+          <a:bodyPr wrap="square">
+            <a:spAutoFit/>
+          </a:bodyPr>
+          <a:lstStyle/>
+          <a:p>
+            <a:r>
+              <a:rPr sz="2600" b="1">
+                <a:solidFill>
+                  <a:srgbClr val="0B3D2E"/>
+                </a:solidFill>
+              </a:rPr>
+              <a:t>❓ Preguntas frecuentes</a:t>
+            </a:r>
+          </a:p>
+        </p:txBody>
+      </p:sp>
+      <p:sp>
+        <p:nvSpPr>
+          <p:cNvPr id="3" name="TextBox 2"/>
+          <p:cNvSpPr txBox="1"/>
+          <p:nvPr/>
+        </p:nvSpPr>
+        <p:spPr>
+          <a:xfrm>
+            <a:off x="457200" y="1280160"/>
+            <a:ext cx="8229600" cy="4937760"/>
+          </a:xfrm>
+          <a:prstGeom prst="rect">
+            <a:avLst/>
+          </a:prstGeom>
+          <a:noFill/>
+        </p:spPr>
+        <p:txBody>
+          <a:bodyPr wrap="square">
+            <a:spAutoFit/>
+          </a:bodyPr>
+          <a:lstStyle/>
+          <a:p>
+            <a:pPr>
+              <a:spcAft>
+                <a:spcPts val="600"/>
+              </a:spcAft>
+            </a:pPr>
+            <a:r>
+              <a:rPr sz="1500">
+                <a:solidFill>
+                  <a:srgbClr val="22282E"/>
+                </a:solidFill>
+              </a:rPr>
+              <a:t>•  ❓ ¿Qué nivel de autonomía le doy al agente en el capstone?</a:t>
+            </a:r>
+          </a:p>
+          <a:p>
+            <a:pPr>
+              <a:spcAft>
+                <a:spcPts val="600"/>
+              </a:spcAft>
+            </a:pPr>
+            <a:r>
+              <a:rPr sz="1500">
+                <a:solidFill>
+                  <a:srgbClr val="22282E"/>
+                </a:solidFill>
+              </a:rPr>
+              <a:t>•  El mínimo para ser útil: recon y resúmenes pueden ser más automáticos; toda acción activa o con</a:t>
+            </a:r>
+          </a:p>
+          <a:p>
+            <a:pPr>
+              <a:spcAft>
+                <a:spcPts val="600"/>
+              </a:spcAft>
+            </a:pPr>
+            <a:r>
+              <a:rPr sz="1500">
+                <a:solidFill>
+                  <a:srgbClr val="22282E"/>
+                </a:solidFill>
+              </a:rPr>
+              <a:t>•  impacto requiere tu aprobación. Tú firmas el informe.</a:t>
+            </a:r>
+          </a:p>
+          <a:p>
+            <a:pPr>
+              <a:spcAft>
+                <a:spcPts val="600"/>
+              </a:spcAft>
+            </a:pPr>
+            <a:r>
+              <a:rPr sz="1500">
+                <a:solidFill>
+                  <a:srgbClr val="22282E"/>
+                </a:solidFill>
+              </a:rPr>
+              <a:t>•  ❓ ¿Y si la IA se equivoca en un hallazgo?</a:t>
+            </a:r>
+          </a:p>
+          <a:p>
+            <a:pPr>
+              <a:spcAft>
+                <a:spcPts val="600"/>
+              </a:spcAft>
+            </a:pPr>
+            <a:r>
+              <a:rPr sz="1500">
+                <a:solidFill>
+                  <a:srgbClr val="22282E"/>
+                </a:solidFill>
+              </a:rPr>
+              <a:t>•  Por eso verificas todo contra la evidencia. Documentar una alucinación que tu supervisión</a:t>
+            </a:r>
+          </a:p>
+          <a:p>
+            <a:pPr>
+              <a:spcAft>
+                <a:spcPts val="600"/>
+              </a:spcAft>
+            </a:pPr>
+            <a:r>
+              <a:rPr sz="1500">
+                <a:solidFill>
+                  <a:srgbClr val="22282E"/>
+                </a:solidFill>
+              </a:rPr>
+              <a:t>•  corrigió es, de hecho, parte del aprendizaje del capstone.</a:t>
+            </a:r>
+          </a:p>
+          <a:p>
+            <a:pPr>
+              <a:spcAft>
+                <a:spcPts val="600"/>
+              </a:spcAft>
+            </a:pPr>
+            <a:r>
+              <a:rPr sz="1500">
+                <a:solidFill>
+                  <a:srgbClr val="22282E"/>
+                </a:solidFill>
+              </a:rPr>
+              <a:t>•  ❓ ¿Esto es el final del programa?</a:t>
+            </a:r>
+          </a:p>
+        </p:txBody>
+      </p:sp>
+    </p:spTree>
+  </p:cSld>
+  <p:clrMapOvr>
+    <a:masterClrMapping/>
+  </p:clrMapOvr>
+</p:sld>
+</file>
+
+<file path=ppt/slides/slide15.xml><?xml version="1.0" encoding="utf-8"?>
+<p:sld xmlns:a="http://schemas.openxmlformats.org/drawingml/2006/main" xmlns:p="http://schemas.openxmlformats.org/presentationml/2006/main" xmlns:r="http://schemas.openxmlformats.org/officeDocument/2006/relationships">
+  <p:cSld>
+    <p:spTree>
+      <p:nvGrpSpPr>
+        <p:cNvPr id="1" name=""/>
+        <p:cNvGrpSpPr/>
+        <p:nvPr/>
+      </p:nvGrpSpPr>
+      <p:grpSpPr/>
+      <p:sp>
+        <p:nvSpPr>
+          <p:cNvPr id="2" name="TextBox 1"/>
+          <p:cNvSpPr txBox="1"/>
+          <p:nvPr/>
+        </p:nvSpPr>
+        <p:spPr>
+          <a:xfrm>
+            <a:off x="457200" y="320040"/>
+            <a:ext cx="8229600" cy="822960"/>
+          </a:xfrm>
+          <a:prstGeom prst="rect">
+            <a:avLst/>
+          </a:prstGeom>
+          <a:noFill/>
+        </p:spPr>
+        <p:txBody>
+          <a:bodyPr wrap="square">
+            <a:spAutoFit/>
+          </a:bodyPr>
+          <a:lstStyle/>
+          <a:p>
+            <a:r>
+              <a:rPr sz="2600" b="1">
+                <a:solidFill>
+                  <a:srgbClr val="0B3D2E"/>
+                </a:solidFill>
+              </a:rPr>
+              <a:t>🔗 Referencias</a:t>
+            </a:r>
+          </a:p>
+        </p:txBody>
+      </p:sp>
+      <p:sp>
+        <p:nvSpPr>
+          <p:cNvPr id="3" name="TextBox 2"/>
+          <p:cNvSpPr txBox="1"/>
+          <p:nvPr/>
+        </p:nvSpPr>
+        <p:spPr>
+          <a:xfrm>
+            <a:off x="457200" y="1280160"/>
+            <a:ext cx="8229600" cy="4937760"/>
+          </a:xfrm>
+          <a:prstGeom prst="rect">
+            <a:avLst/>
+          </a:prstGeom>
+          <a:noFill/>
+        </p:spPr>
+        <p:txBody>
+          <a:bodyPr wrap="square">
+            <a:spAutoFit/>
+          </a:bodyPr>
+          <a:lstStyle/>
+          <a:p>
+            <a:pPr>
+              <a:spcAft>
+                <a:spcPts val="600"/>
+              </a:spcAft>
+            </a:pPr>
+            <a:r>
+              <a:rPr sz="1500">
+                <a:solidFill>
+                  <a:srgbClr val="22282E"/>
+                </a:solidFill>
+              </a:rPr>
               <a:t>•  kali-mcp (MIT) — &lt;https://github.com/pabpereza/kali-mcp&gt;</a:t>
             </a:r>
           </a:p>
@@ -3599,6 +4110,81 @@
           </a:p>
         </p:txBody>
       </p:sp>
+    </p:spTree>
+  </p:cSld>
+  <p:clrMapOvr>
+    <a:masterClrMapping/>
+  </p:clrMapOvr>
+</p:sld>
+</file>
+
+<file path=ppt/slides/slide16.xml><?xml version="1.0" encoding="utf-8"?>
+<p:sld xmlns:a="http://schemas.openxmlformats.org/drawingml/2006/main" xmlns:p="http://schemas.openxmlformats.org/presentationml/2006/main" xmlns:r="http://schemas.openxmlformats.org/officeDocument/2006/relationships">
+  <p:cSld>
+    <p:spTree>
+      <p:nvGrpSpPr>
+        <p:cNvPr id="1" name=""/>
+        <p:cNvGrpSpPr/>
+        <p:nvPr/>
+      </p:nvGrpSpPr>
+      <p:grpSpPr/>
+      <p:sp>
+        <p:nvSpPr>
+          <p:cNvPr id="2" name="TextBox 1"/>
+          <p:cNvSpPr txBox="1"/>
+          <p:nvPr/>
+        </p:nvSpPr>
+        <p:spPr>
+          <a:xfrm>
+            <a:off x="457200" y="274320"/>
+            <a:ext cx="8229600" cy="640080"/>
+          </a:xfrm>
+          <a:prstGeom prst="rect">
+            <a:avLst/>
+          </a:prstGeom>
+          <a:noFill/>
+        </p:spPr>
+        <p:txBody>
+          <a:bodyPr wrap="square">
+            <a:spAutoFit/>
+          </a:bodyPr>
+          <a:lstStyle/>
+          <a:p>
+            <a:r>
+              <a:rPr sz="2200" b="1">
+                <a:solidFill>
+                  <a:srgbClr val="0B3D2E"/>
+                </a:solidFill>
+              </a:rPr>
+              <a:t>Diagrama de la clase</a:t>
+            </a:r>
+          </a:p>
+        </p:txBody>
+      </p:sp>
+      <p:pic>
+        <p:nvPicPr>
+          <p:cNvPr id="3" name="Picture 2" descr="97b53b2ffa3cd063.png"/>
+          <p:cNvPicPr>
+            <a:picLocks noChangeAspect="1"/>
+          </p:cNvPicPr>
+          <p:nvPr/>
+        </p:nvPicPr>
+        <p:blipFill>
+          <a:blip r:embed="rId2"/>
+          <a:stretch>
+            <a:fillRect/>
+          </a:stretch>
+        </p:blipFill>
+        <p:spPr>
+          <a:xfrm>
+            <a:off x="457200" y="3322951"/>
+            <a:ext cx="8229599" cy="852177"/>
+          </a:xfrm>
+          <a:prstGeom prst="rect">
+            <a:avLst/>
+          </a:prstGeom>
+        </p:spPr>
+      </p:pic>
     </p:spTree>
   </p:cSld>
   <p:clrMapOvr>
@@ -4107,7 +4693,7 @@
                   <a:srgbClr val="0B3D2E"/>
                 </a:solidFill>
               </a:rPr>
-              <a:t>📖 Definiciones y características</a:t>
+              <a:t>🧠 Explicación en profundidad</a:t>
             </a:r>
           </a:p>
         </p:txBody>
@@ -4145,82 +4731,37 @@
                   <a:srgbClr val="22282E"/>
                 </a:solidFill>
               </a:rPr>
-              <a:t>•  Capstone</a:t>
-            </a:r>
-          </a:p>
-          <a:p>
-            <a:pPr>
-              <a:spcAft>
-                <a:spcPts val="600"/>
-              </a:spcAft>
-            </a:pPr>
-            <a:r>
-              <a:rPr sz="1500">
-                <a:solidFill>
-                  <a:srgbClr val="22282E"/>
-                </a:solidFill>
-              </a:rPr>
-              <a:t>•  Proyecto integrador que exige aplicar, de forma coherente y completa, competencias de todo el programa en un caso realista y acotado.</a:t>
-            </a:r>
-          </a:p>
-          <a:p>
-            <a:pPr>
-              <a:spcAft>
-                <a:spcPts val="600"/>
-              </a:spcAft>
-            </a:pPr>
-            <a:r>
-              <a:rPr sz="1500">
-                <a:solidFill>
-                  <a:srgbClr val="22282E"/>
-                </a:solidFill>
-              </a:rPr>
-              <a:t>•  Documento de alcance (RoE)</a:t>
-            </a:r>
-          </a:p>
-          <a:p>
-            <a:pPr>
-              <a:spcAft>
-                <a:spcPts val="600"/>
-              </a:spcAft>
-            </a:pPr>
-            <a:r>
-              <a:rPr sz="1500">
-                <a:solidFill>
-                  <a:srgbClr val="22282E"/>
-                </a:solidFill>
-              </a:rPr>
-              <a:t>•  Define objetivos, límites, ventana y autorización. Aquí lo redactas tú para tu propio laboratorio; en el mundo real lo firma el cliente.</a:t>
-            </a:r>
-          </a:p>
-          <a:p>
-            <a:pPr>
-              <a:spcAft>
-                <a:spcPts val="600"/>
-              </a:spcAft>
-            </a:pPr>
-            <a:r>
-              <a:rPr sz="1500">
-                <a:solidFill>
-                  <a:srgbClr val="22282E"/>
-                </a:solidFill>
-              </a:rPr>
-              <a:t>•  Evidencia reproducible</a:t>
-            </a:r>
-          </a:p>
-          <a:p>
-            <a:pPr>
-              <a:spcAft>
-                <a:spcPts val="600"/>
-              </a:spcAft>
-            </a:pPr>
-            <a:r>
-              <a:rPr sz="1500">
-                <a:solidFill>
-                  <a:srgbClr val="22282E"/>
-                </a:solidFill>
-              </a:rPr>
-              <a:t>•  Cada hallazgo del informe puede repetirse manualmente con la herramienta correspondiente, sin depender de la palabra de la IA.</a:t>
+              <a:t>•  El capstone evalúa el sistema sociotécnico completo: contrato, agente, MCP, Kali aislado, evidencia, informe y cleanup. El éxito no es autonomía máxima, sino decisiones revisables sin exceder…</a:t>
+            </a:r>
+          </a:p>
+          <a:p>
+            <a:pPr>
+              <a:spcAft>
+                <a:spcPts val="600"/>
+              </a:spcAft>
+            </a:pPr>
+            <a:r>
+              <a:rPr sz="1500">
+                <a:solidFill>
+                  <a:srgbClr val="22282E"/>
+                </a:solidFill>
+              </a:rPr>
+              <a:t>•  El diagrama separa lenguaje de autoridad. El modelo puede proponer; la política determina si la operación pertenece al alcance; la herramienta produce evidencia; y una persona o control determinista…</a:t>
+            </a:r>
+          </a:p>
+          <a:p>
+            <a:pPr>
+              <a:spcAft>
+                <a:spcPts val="600"/>
+              </a:spcAft>
+            </a:pPr>
+            <a:r>
+              <a:rPr sz="1500">
+                <a:solidFill>
+                  <a:srgbClr val="22282E"/>
+                </a:solidFill>
+              </a:rPr>
+              <a:t>•  El agente encuentra una ruta crítica fuera de horario. Se pausa, solicita autorización y conserva contexto sin ejecutarla.</a:t>
             </a:r>
           </a:p>
         </p:txBody>
@@ -4271,7 +4812,7 @@
                   <a:srgbClr val="0B3D2E"/>
                 </a:solidFill>
               </a:rPr>
-              <a:t>🧰 Herramientas y preparación</a:t>
+              <a:t>📔 Glosario operativo</a:t>
             </a:r>
           </a:p>
         </p:txBody>
@@ -4309,37 +4850,52 @@
                   <a:srgbClr val="22282E"/>
                 </a:solidFill>
               </a:rPr>
-              <a:t>•  Una VM vulnerable propia (Metasploitable, DVWA, o el lab appsec-web) en red aislada.</a:t>
-            </a:r>
-          </a:p>
-          <a:p>
-            <a:pPr>
-              <a:spcAft>
-                <a:spcPts val="600"/>
-              </a:spcAft>
-            </a:pPr>
-            <a:r>
-              <a:rPr sz="1500">
-                <a:solidFill>
-                  <a:srgbClr val="22282E"/>
-                </a:solidFill>
-              </a:rPr>
-              <a:t>•  kali-mcp montado (clase 333) y tu cliente de IA con MCP.</a:t>
-            </a:r>
-          </a:p>
-          <a:p>
-            <a:pPr>
-              <a:spcAft>
-                <a:spcPts val="600"/>
-              </a:spcAft>
-            </a:pPr>
-            <a:r>
-              <a:rPr sz="1500">
-                <a:solidFill>
-                  <a:srgbClr val="22282E"/>
-                </a:solidFill>
-              </a:rPr>
-              <a:t>•  El lab kali-mcp-ia del programa como guía de montaje.</a:t>
+              <a:t>•  Término — Definición</a:t>
+            </a:r>
+          </a:p>
+          <a:p>
+            <a:pPr>
+              <a:spcAft>
+                <a:spcPts val="600"/>
+              </a:spcAft>
+            </a:pPr>
+            <a:r>
+              <a:rPr sz="1500">
+                <a:solidFill>
+                  <a:srgbClr val="22282E"/>
+                </a:solidFill>
+              </a:rPr>
+              <a:t>•  Human checkpoint — Punto donde una persona con autoridad aprueba una transición de riesgo.</a:t>
+            </a:r>
+          </a:p>
+          <a:p>
+            <a:pPr>
+              <a:spcAft>
+                <a:spcPts val="600"/>
+              </a:spcAft>
+            </a:pPr>
+            <a:r>
+              <a:rPr sz="1500">
+                <a:solidFill>
+                  <a:srgbClr val="22282E"/>
+                </a:solidFill>
+              </a:rPr>
+              <a:t>•  Guardrail — Capa que reduce una capacidad o detecta su uso; no garantía absoluta.</a:t>
+            </a:r>
+          </a:p>
+          <a:p>
+            <a:pPr>
+              <a:spcAft>
+                <a:spcPts val="600"/>
+              </a:spcAft>
+            </a:pPr>
+            <a:r>
+              <a:rPr sz="1500">
+                <a:solidFill>
+                  <a:srgbClr val="22282E"/>
+                </a:solidFill>
+              </a:rPr>
+              <a:t>•  Audit trail — Registro ordenado de solicitudes, decisiones, ejecuciones y resultados.</a:t>
             </a:r>
           </a:p>
         </p:txBody>
@@ -4390,7 +4946,7 @@
                   <a:srgbClr val="0B3D2E"/>
                 </a:solidFill>
               </a:rPr>
-              <a:t>🧪 Desarrollo guiado</a:t>
+              <a:t>✅ Criterio de dominio</a:t>
             </a:r>
           </a:p>
         </p:txBody>
@@ -4428,97 +4984,7 @@
                   <a:srgbClr val="22282E"/>
                 </a:solidFill>
               </a:rPr>
-              <a:t>•  Escribe tu RoE + guardrails. Alcance = tu VM; matriz de permisos; política de datos; registro de auditoría.</a:t>
-            </a:r>
-          </a:p>
-          <a:p>
-            <a:pPr>
-              <a:spcAft>
-                <a:spcPts val="600"/>
-              </a:spcAft>
-            </a:pPr>
-            <a:r>
-              <a:rPr sz="1500">
-                <a:solidFill>
-                  <a:srgbClr val="22282E"/>
-                </a:solidFill>
-              </a:rPr>
-              <a:t>•  Monta kali-mcp y verifica el aislamiento de red del contenedor.</a:t>
-            </a:r>
-          </a:p>
-          <a:p>
-            <a:pPr>
-              <a:spcAft>
-                <a:spcPts val="600"/>
-              </a:spcAft>
-            </a:pPr>
-            <a:r>
-              <a:rPr sz="1500">
-                <a:solidFill>
-                  <a:srgbClr val="22282E"/>
-                </a:solidFill>
-              </a:rPr>
-              <a:t>•  Recon y auditoría asistidos, validando manualmente cada hallazgo clave.</a:t>
-            </a:r>
-          </a:p>
-          <a:p>
-            <a:pPr>
-              <a:spcAft>
-                <a:spcPts val="600"/>
-              </a:spcAft>
-            </a:pPr>
-            <a:r>
-              <a:rPr sz="1500">
-                <a:solidFill>
-                  <a:srgbClr val="22282E"/>
-                </a:solidFill>
-              </a:rPr>
-              <a:t>•  Elige y aprueba un vector de PoC de bajo impacto; ejecútalo con trazabilidad.</a:t>
-            </a:r>
-          </a:p>
-          <a:p>
-            <a:pPr>
-              <a:spcAft>
-                <a:spcPts val="600"/>
-              </a:spcAft>
-            </a:pPr>
-            <a:r>
-              <a:rPr sz="1500">
-                <a:solidFill>
-                  <a:srgbClr val="22282E"/>
-                </a:solidFill>
-              </a:rPr>
-              <a:t>•  Post-explotación mínima para demostrar impacto, sin tocar datos ni salir de alcance.</a:t>
-            </a:r>
-          </a:p>
-          <a:p>
-            <a:pPr>
-              <a:spcAft>
-                <a:spcPts val="600"/>
-              </a:spcAft>
-            </a:pPr>
-            <a:r>
-              <a:rPr sz="1500">
-                <a:solidFill>
-                  <a:srgbClr val="22282E"/>
-                </a:solidFill>
-              </a:rPr>
-              <a:t>•  Genera el informe con IA y verifica cada hallazgo contra la evidencia.</a:t>
-            </a:r>
-          </a:p>
-          <a:p>
-            <a:pPr>
-              <a:spcAft>
-                <a:spcPts val="600"/>
-              </a:spcAft>
-            </a:pPr>
-            <a:r>
-              <a:rPr sz="1500">
-                <a:solidFill>
-                  <a:srgbClr val="22282E"/>
-                </a:solidFill>
-              </a:rPr>
-              <a:t>•  Retrospectiva: ¿qué aceleró la IA? ¿qué alucinó? ¿dónde fue imprescindible tu criterio?</a:t>
+              <a:t>•  El alumno demuestra dominio cuando reproduce el flujo completo, puede atribuir cada acción, evita que texto no confiable otorgue autoridad y explica qué control contiene un fallo del modelo.</a:t>
             </a:r>
           </a:p>
         </p:txBody>
@@ -4569,7 +5035,7 @@
                   <a:srgbClr val="0B3D2E"/>
                 </a:solidFill>
               </a:rPr>
-              <a:t>✍️ Ejercicios</a:t>
+              <a:t>📖 Definiciones y características</a:t>
             </a:r>
           </a:p>
         </p:txBody>
@@ -4607,67 +5073,82 @@
                   <a:srgbClr val="22282E"/>
                 </a:solidFill>
               </a:rPr>
-              <a:t>•  Redacta el documento de alcance/RoE de tu capstone.</a:t>
-            </a:r>
-          </a:p>
-          <a:p>
-            <a:pPr>
-              <a:spcAft>
-                <a:spcPts val="600"/>
-              </a:spcAft>
-            </a:pPr>
-            <a:r>
-              <a:rPr sz="1500">
-                <a:solidFill>
-                  <a:srgbClr val="22282E"/>
-                </a:solidFill>
-              </a:rPr>
-              <a:t>•  Diseña la matriz de permisos del agente para esta operación.</a:t>
-            </a:r>
-          </a:p>
-          <a:p>
-            <a:pPr>
-              <a:spcAft>
-                <a:spcPts val="600"/>
-              </a:spcAft>
-            </a:pPr>
-            <a:r>
-              <a:rPr sz="1500">
-                <a:solidFill>
-                  <a:srgbClr val="22282E"/>
-                </a:solidFill>
-              </a:rPr>
-              <a:t>•  Define cómo registrarás la trazabilidad de cada acción.</a:t>
-            </a:r>
-          </a:p>
-          <a:p>
-            <a:pPr>
-              <a:spcAft>
-                <a:spcPts val="600"/>
-              </a:spcAft>
-            </a:pPr>
-            <a:r>
-              <a:rPr sz="1500">
-                <a:solidFill>
-                  <a:srgbClr val="22282E"/>
-                </a:solidFill>
-              </a:rPr>
-              <a:t>•  Especifica los límites de post-explotación que respetarás.</a:t>
-            </a:r>
-          </a:p>
-          <a:p>
-            <a:pPr>
-              <a:spcAft>
-                <a:spcPts val="600"/>
-              </a:spcAft>
-            </a:pPr>
-            <a:r>
-              <a:rPr sz="1500">
-                <a:solidFill>
-                  <a:srgbClr val="22282E"/>
-                </a:solidFill>
-              </a:rPr>
-              <a:t>•  Prepara la plantilla del informe final.</a:t>
+              <a:t>•  Capstone</a:t>
+            </a:r>
+          </a:p>
+          <a:p>
+            <a:pPr>
+              <a:spcAft>
+                <a:spcPts val="600"/>
+              </a:spcAft>
+            </a:pPr>
+            <a:r>
+              <a:rPr sz="1500">
+                <a:solidFill>
+                  <a:srgbClr val="22282E"/>
+                </a:solidFill>
+              </a:rPr>
+              <a:t>•  Proyecto integrador que exige aplicar, de forma coherente y completa, competencias de todo el programa en un caso realista y acotado.</a:t>
+            </a:r>
+          </a:p>
+          <a:p>
+            <a:pPr>
+              <a:spcAft>
+                <a:spcPts val="600"/>
+              </a:spcAft>
+            </a:pPr>
+            <a:r>
+              <a:rPr sz="1500">
+                <a:solidFill>
+                  <a:srgbClr val="22282E"/>
+                </a:solidFill>
+              </a:rPr>
+              <a:t>•  Documento de alcance (RoE)</a:t>
+            </a:r>
+          </a:p>
+          <a:p>
+            <a:pPr>
+              <a:spcAft>
+                <a:spcPts val="600"/>
+              </a:spcAft>
+            </a:pPr>
+            <a:r>
+              <a:rPr sz="1500">
+                <a:solidFill>
+                  <a:srgbClr val="22282E"/>
+                </a:solidFill>
+              </a:rPr>
+              <a:t>•  Define objetivos, límites, ventana y autorización. Aquí lo redactas tú para tu propio laboratorio; en el mundo real lo firma el cliente.</a:t>
+            </a:r>
+          </a:p>
+          <a:p>
+            <a:pPr>
+              <a:spcAft>
+                <a:spcPts val="600"/>
+              </a:spcAft>
+            </a:pPr>
+            <a:r>
+              <a:rPr sz="1500">
+                <a:solidFill>
+                  <a:srgbClr val="22282E"/>
+                </a:solidFill>
+              </a:rPr>
+              <a:t>•  Evidencia reproducible</a:t>
+            </a:r>
+          </a:p>
+          <a:p>
+            <a:pPr>
+              <a:spcAft>
+                <a:spcPts val="600"/>
+              </a:spcAft>
+            </a:pPr>
+            <a:r>
+              <a:rPr sz="1500">
+                <a:solidFill>
+                  <a:srgbClr val="22282E"/>
+                </a:solidFill>
+              </a:rPr>
+              <a:t>•  Cada hallazgo del informe puede repetirse manualmente con la herramienta correspondiente, sin depender de la palabra de la IA.</a:t>
             </a:r>
           </a:p>
         </p:txBody>
@@ -4718,7 +5199,7 @@
                   <a:srgbClr val="0B3D2E"/>
                 </a:solidFill>
               </a:rPr>
-              <a:t>📝 Reto verificable (entregable del capstone)</a:t>
+              <a:t>🧰 Herramientas y preparación</a:t>
             </a:r>
           </a:p>
         </p:txBody>
@@ -4756,97 +5237,37 @@
                   <a:srgbClr val="22282E"/>
                 </a:solidFill>
               </a:rPr>
-              <a:t>•  Un paquete de engagement de tu laboratorio que incluya: (a) RoE + guardrails, (b) registro</a:t>
-            </a:r>
-          </a:p>
-          <a:p>
-            <a:pPr>
-              <a:spcAft>
-                <a:spcPts val="600"/>
-              </a:spcAft>
-            </a:pPr>
-            <a:r>
-              <a:rPr sz="1500">
-                <a:solidFill>
-                  <a:srgbClr val="22282E"/>
-                </a:solidFill>
-              </a:rPr>
-              <a:t>•  de auditoría de la sesión, (c) informe con hallazgos reproducibles, y (d) una retrospectiva</a:t>
-            </a:r>
-          </a:p>
-          <a:p>
-            <a:pPr>
-              <a:spcAft>
-                <a:spcPts val="600"/>
-              </a:spcAft>
-            </a:pPr>
-            <a:r>
-              <a:rPr sz="1500">
-                <a:solidFill>
-                  <a:srgbClr val="22282E"/>
-                </a:solidFill>
-              </a:rPr>
-              <a:t>•  crítica del uso de IA.</a:t>
-            </a:r>
-          </a:p>
-          <a:p>
-            <a:pPr>
-              <a:spcAft>
-                <a:spcPts val="600"/>
-              </a:spcAft>
-            </a:pPr>
-            <a:r>
-              <a:rPr sz="1500">
-                <a:solidFill>
-                  <a:srgbClr val="22282E"/>
-                </a:solidFill>
-              </a:rPr>
-              <a:t>•  Criterio de aceptación: todo ocurrió dentro del alcance (tu VM); cada acción con impacto fue</a:t>
-            </a:r>
-          </a:p>
-          <a:p>
-            <a:pPr>
-              <a:spcAft>
-                <a:spcPts val="600"/>
-              </a:spcAft>
-            </a:pPr>
-            <a:r>
-              <a:rPr sz="1500">
-                <a:solidFill>
-                  <a:srgbClr val="22282E"/>
-                </a:solidFill>
-              </a:rPr>
-              <a:t>•  aprobada por ti; cada hallazgo del informe es reproducible manualmente; la retrospectiva</a:t>
-            </a:r>
-          </a:p>
-          <a:p>
-            <a:pPr>
-              <a:spcAft>
-                <a:spcPts val="600"/>
-              </a:spcAft>
-            </a:pPr>
-            <a:r>
-              <a:rPr sz="1500">
-                <a:solidFill>
-                  <a:srgbClr val="22282E"/>
-                </a:solidFill>
-              </a:rPr>
-              <a:t>•  identifica al menos un aporte real de la IA y al menos una limitación (p. ej. una alucinación) que</a:t>
-            </a:r>
-          </a:p>
-          <a:p>
-            <a:pPr>
-              <a:spcAft>
-                <a:spcPts val="600"/>
-              </a:spcAft>
-            </a:pPr>
-            <a:r>
-              <a:rPr sz="1500">
-                <a:solidFill>
-                  <a:srgbClr val="22282E"/>
-                </a:solidFill>
-              </a:rPr>
-              <a:t>•  tu supervisión corrigió.</a:t>
+              <a:t>•  Una VM vulnerable propia (Metasploitable, DVWA, o el lab appsec-web) en red aislada.</a:t>
+            </a:r>
+          </a:p>
+          <a:p>
+            <a:pPr>
+              <a:spcAft>
+                <a:spcPts val="600"/>
+              </a:spcAft>
+            </a:pPr>
+            <a:r>
+              <a:rPr sz="1500">
+                <a:solidFill>
+                  <a:srgbClr val="22282E"/>
+                </a:solidFill>
+              </a:rPr>
+              <a:t>•  kali-mcp montado (clase 333) y tu cliente de IA con MCP.</a:t>
+            </a:r>
+          </a:p>
+          <a:p>
+            <a:pPr>
+              <a:spcAft>
+                <a:spcPts val="600"/>
+              </a:spcAft>
+            </a:pPr>
+            <a:r>
+              <a:rPr sz="1500">
+                <a:solidFill>
+                  <a:srgbClr val="22282E"/>
+                </a:solidFill>
+              </a:rPr>
+              <a:t>•  El lab kali-mcp-ia del programa como guía de montaje.</a:t>
             </a:r>
           </a:p>
         </p:txBody>
